--- a/Nearer My God To Thee.pptx
+++ b/Nearer My God To Thee.pptx
@@ -251,7 +251,7 @@
           <a:p>
             <a:fld id="{E759A0DE-F190-5444-87AC-4719D5F20D15}" type="datetimeFigureOut">
               <a:rPr lang="en-US" smtClean="0"/>
-              <a:t>7/18/26</a:t>
+              <a:t>8/6/26</a:t>
             </a:fld>
             <a:endParaRPr lang="en-US"/>
           </a:p>
@@ -421,7 +421,7 @@
           <a:p>
             <a:fld id="{E759A0DE-F190-5444-87AC-4719D5F20D15}" type="datetimeFigureOut">
               <a:rPr lang="en-US" smtClean="0"/>
-              <a:t>7/18/26</a:t>
+              <a:t>8/6/26</a:t>
             </a:fld>
             <a:endParaRPr lang="en-US"/>
           </a:p>
@@ -601,7 +601,7 @@
           <a:p>
             <a:fld id="{E759A0DE-F190-5444-87AC-4719D5F20D15}" type="datetimeFigureOut">
               <a:rPr lang="en-US" smtClean="0"/>
-              <a:t>7/18/26</a:t>
+              <a:t>8/6/26</a:t>
             </a:fld>
             <a:endParaRPr lang="en-US"/>
           </a:p>
@@ -771,7 +771,7 @@
           <a:p>
             <a:fld id="{E759A0DE-F190-5444-87AC-4719D5F20D15}" type="datetimeFigureOut">
               <a:rPr lang="en-US" smtClean="0"/>
-              <a:t>7/18/26</a:t>
+              <a:t>8/6/26</a:t>
             </a:fld>
             <a:endParaRPr lang="en-US"/>
           </a:p>
@@ -1017,7 +1017,7 @@
           <a:p>
             <a:fld id="{E759A0DE-F190-5444-87AC-4719D5F20D15}" type="datetimeFigureOut">
               <a:rPr lang="en-US" smtClean="0"/>
-              <a:t>7/18/26</a:t>
+              <a:t>8/6/26</a:t>
             </a:fld>
             <a:endParaRPr lang="en-US"/>
           </a:p>
@@ -1249,7 +1249,7 @@
           <a:p>
             <a:fld id="{E759A0DE-F190-5444-87AC-4719D5F20D15}" type="datetimeFigureOut">
               <a:rPr lang="en-US" smtClean="0"/>
-              <a:t>7/18/26</a:t>
+              <a:t>8/6/26</a:t>
             </a:fld>
             <a:endParaRPr lang="en-US"/>
           </a:p>
@@ -1616,7 +1616,7 @@
           <a:p>
             <a:fld id="{E759A0DE-F190-5444-87AC-4719D5F20D15}" type="datetimeFigureOut">
               <a:rPr lang="en-US" smtClean="0"/>
-              <a:t>7/18/26</a:t>
+              <a:t>8/6/26</a:t>
             </a:fld>
             <a:endParaRPr lang="en-US"/>
           </a:p>
@@ -1734,7 +1734,7 @@
           <a:p>
             <a:fld id="{E759A0DE-F190-5444-87AC-4719D5F20D15}" type="datetimeFigureOut">
               <a:rPr lang="en-US" smtClean="0"/>
-              <a:t>7/18/26</a:t>
+              <a:t>8/6/26</a:t>
             </a:fld>
             <a:endParaRPr lang="en-US"/>
           </a:p>
@@ -1829,7 +1829,7 @@
           <a:p>
             <a:fld id="{E759A0DE-F190-5444-87AC-4719D5F20D15}" type="datetimeFigureOut">
               <a:rPr lang="en-US" smtClean="0"/>
-              <a:t>7/18/26</a:t>
+              <a:t>8/6/26</a:t>
             </a:fld>
             <a:endParaRPr lang="en-US"/>
           </a:p>
@@ -2106,7 +2106,7 @@
           <a:p>
             <a:fld id="{E759A0DE-F190-5444-87AC-4719D5F20D15}" type="datetimeFigureOut">
               <a:rPr lang="en-US" smtClean="0"/>
-              <a:t>7/18/26</a:t>
+              <a:t>8/6/26</a:t>
             </a:fld>
             <a:endParaRPr lang="en-US"/>
           </a:p>
@@ -2363,7 +2363,7 @@
           <a:p>
             <a:fld id="{E759A0DE-F190-5444-87AC-4719D5F20D15}" type="datetimeFigureOut">
               <a:rPr lang="en-US" smtClean="0"/>
-              <a:t>7/18/26</a:t>
+              <a:t>8/6/26</a:t>
             </a:fld>
             <a:endParaRPr lang="en-US"/>
           </a:p>
@@ -2576,7 +2576,7 @@
           <a:p>
             <a:fld id="{E759A0DE-F190-5444-87AC-4719D5F20D15}" type="datetimeFigureOut">
               <a:rPr lang="en-US" smtClean="0"/>
-              <a:t>7/18/26</a:t>
+              <a:t>8/6/26</a:t>
             </a:fld>
             <a:endParaRPr lang="en-US"/>
           </a:p>
@@ -3052,7 +3052,7 @@
         <p:spPr>
           <a:xfrm>
             <a:off x="168442" y="5444311"/>
-            <a:ext cx="8807115" cy="1200329"/>
+            <a:ext cx="8807115" cy="923330"/>
           </a:xfrm>
           <a:prstGeom prst="rect">
             <a:avLst/>
@@ -3072,29 +3072,26 @@
                   <a:schemeClr val="bg1"/>
                 </a:solidFill>
               </a:rPr>
-              <a:t>Words by Sarah Flower Adams (1841)</a:t>
+              <a:t>Words  &amp; Music by Sarah Flower Adams (1841)</a:t>
             </a:r>
           </a:p>
           <a:p>
             <a:pPr algn="ctr"/>
             <a:r>
+              <a:rPr lang="en-US">
+                <a:solidFill>
+                  <a:schemeClr val="bg1"/>
+                </a:solidFill>
+              </a:rPr>
+              <a:t>Public </a:t>
+            </a:r>
+            <a:r>
               <a:rPr lang="en-US" dirty="0">
                 <a:solidFill>
                   <a:schemeClr val="bg1"/>
                 </a:solidFill>
               </a:rPr>
-              <a:t>Music Sarah Flower Adams (1841)</a:t>
-            </a:r>
-          </a:p>
-          <a:p>
-            <a:pPr algn="ctr"/>
-            <a:r>
-              <a:rPr lang="en-US" dirty="0">
-                <a:solidFill>
-                  <a:schemeClr val="bg1"/>
-                </a:solidFill>
-              </a:rPr>
-              <a:t>Public Domain</a:t>
+              <a:t>Domain</a:t>
             </a:r>
           </a:p>
           <a:p>
